--- a/inbox/Application Aware Networking/Vol_VII_Book_06_FedAAN_SaaS_Integration_Governance.pptx
+++ b/inbox/Application Aware Networking/Vol_VII_Book_06_FedAAN_SaaS_Integration_Governance.pptx
@@ -738,7 +738,7 @@
           <a:lstStyle/>
           <a:p>
             <a:r>
-              <a:t>Explain the architectural choice, because someone will ask why a Volume VII book ships its implementation in the Volume IX kit folder. The honest answer: the day-2 scoped app already carries the Graph-via-MID plumbing and the SoD pre-flight gate, and Lane E — app registration — is the same catalog grammar. Forking a second app to satisfy a volume label would duplicate the Script Includes, Flow, ATF harness and update set for one lane, which is exactly what Book 05 warns against. Reuse wins; the cross-volume pointer is the price. Acknowledge it is a signal this book may architecturally belong in Volume IX. Also flag, without paying it here: Volume VII registers no kit at all, and the x_ssa_fed_compliance app that Book 05 calls "the deployable counterpart" does not exist on disk — that is Book 05's debt.</a:t>
+              <a:t>Explain the architectural choice, because someone will ask why a Volume VII book ships its implementation in the Volume IX kit folder. The honest answer: the day-2 scoped app already carries the Graph-via-MID plumbing and the SoD pre-flight gate, and Lane E — app registration — is the same catalog grammar. Forking a second app to satisfy a volume label would duplicate the Script Includes, Flow, ATF harness and update set for one lane, which is exactly what Book 05 warns against. Reuse wins; the cross-volume pointer is the price. Acknowledge it is a signal this book may architecturally belong in Volume IX. Book 05's own deployable, the x_ssa_fed_compliance skeleton, now exists on disk and is spine-registered — so the reuse decision here is about not duplicating plumbing, not about a missing alternative.</a:t>
             </a:r>
           </a:p>
           <a:p/>
@@ -5327,7 +5327,7 @@
                 </a:solidFill>
                 <a:latin typeface="Arial"/>
               </a:rPr>
-              <a:t>Date Code: 2026-07-14 10:17 ET</a:t>
+              <a:t>Date Code: 2026-07-14 11:56 ET</a:t>
             </a:r>
           </a:p>
         </p:txBody>
@@ -5515,7 +5515,7 @@
                 </a:solidFill>
                 <a:latin typeface="Arial"/>
               </a:rPr>
-              <a:t>SaaS Integration Governance · Date Code: 2026-07-14 10:17 ET</a:t>
+              <a:t>SaaS Integration Governance · Date Code: 2026-07-14 11:56 ET</a:t>
             </a:r>
           </a:p>
         </p:txBody>
@@ -6961,7 +6961,7 @@
                 </a:solidFill>
                 <a:latin typeface="Arial"/>
               </a:rPr>
-              <a:t>SaaS Integration Governance · Date Code: 2026-07-14 10:17 ET</a:t>
+              <a:t>SaaS Integration Governance · Date Code: 2026-07-14 11:56 ET</a:t>
             </a:r>
           </a:p>
         </p:txBody>
@@ -8407,7 +8407,7 @@
                 </a:solidFill>
                 <a:latin typeface="Arial"/>
               </a:rPr>
-              <a:t>SaaS Integration Governance · Date Code: 2026-07-14 10:17 ET</a:t>
+              <a:t>SaaS Integration Governance · Date Code: 2026-07-14 11:56 ET</a:t>
             </a:r>
           </a:p>
         </p:txBody>
@@ -9314,7 +9314,7 @@
                 </a:solidFill>
                 <a:latin typeface="Arial"/>
               </a:rPr>
-              <a:t>SaaS Integration Governance · Date Code: 2026-07-14 10:17 ET</a:t>
+              <a:t>SaaS Integration Governance · Date Code: 2026-07-14 11:56 ET</a:t>
             </a:r>
           </a:p>
         </p:txBody>
@@ -10221,7 +10221,7 @@
                 </a:solidFill>
                 <a:latin typeface="Arial"/>
               </a:rPr>
-              <a:t>SaaS Integration Governance · Date Code: 2026-07-14 10:17 ET</a:t>
+              <a:t>SaaS Integration Governance · Date Code: 2026-07-14 11:56 ET</a:t>
             </a:r>
           </a:p>
         </p:txBody>
@@ -11128,7 +11128,7 @@
                 </a:solidFill>
                 <a:latin typeface="Arial"/>
               </a:rPr>
-              <a:t>SaaS Integration Governance · Date Code: 2026-07-14 10:17 ET</a:t>
+              <a:t>SaaS Integration Governance · Date Code: 2026-07-14 11:56 ET</a:t>
             </a:r>
           </a:p>
         </p:txBody>
@@ -12035,7 +12035,7 @@
                 </a:solidFill>
                 <a:latin typeface="Arial"/>
               </a:rPr>
-              <a:t>SaaS Integration Governance · Date Code: 2026-07-14 10:17 ET</a:t>
+              <a:t>SaaS Integration Governance · Date Code: 2026-07-14 11:56 ET</a:t>
             </a:r>
           </a:p>
         </p:txBody>
@@ -12258,7 +12258,7 @@
                 </a:solidFill>
                 <a:latin typeface="Arial"/>
               </a:rPr>
-              <a:t>SaaS Integration Governance · Date Code: 2026-07-14 10:17 ET</a:t>
+              <a:t>SaaS Integration Governance · Date Code: 2026-07-14 11:56 ET</a:t>
             </a:r>
           </a:p>
         </p:txBody>
@@ -13165,7 +13165,7 @@
                 </a:solidFill>
                 <a:latin typeface="Arial"/>
               </a:rPr>
-              <a:t>SaaS Integration Governance · Date Code: 2026-07-14 10:17 ET</a:t>
+              <a:t>SaaS Integration Governance · Date Code: 2026-07-14 11:56 ET</a:t>
             </a:r>
           </a:p>
         </p:txBody>
@@ -14072,7 +14072,7 @@
                 </a:solidFill>
                 <a:latin typeface="Arial"/>
               </a:rPr>
-              <a:t>SaaS Integration Governance · Date Code: 2026-07-14 10:17 ET</a:t>
+              <a:t>SaaS Integration Governance · Date Code: 2026-07-14 11:56 ET</a:t>
             </a:r>
           </a:p>
         </p:txBody>
@@ -15518,7 +15518,7 @@
                 </a:solidFill>
                 <a:latin typeface="Arial"/>
               </a:rPr>
-              <a:t>SaaS Integration Governance · Date Code: 2026-07-14 10:17 ET</a:t>
+              <a:t>SaaS Integration Governance · Date Code: 2026-07-14 11:56 ET</a:t>
             </a:r>
           </a:p>
         </p:txBody>
@@ -16964,7 +16964,7 @@
                 </a:solidFill>
                 <a:latin typeface="Arial"/>
               </a:rPr>
-              <a:t>SaaS Integration Governance · Date Code: 2026-07-14 10:17 ET</a:t>
+              <a:t>SaaS Integration Governance · Date Code: 2026-07-14 11:56 ET</a:t>
             </a:r>
           </a:p>
         </p:txBody>
@@ -18410,7 +18410,7 @@
                 </a:solidFill>
                 <a:latin typeface="Arial"/>
               </a:rPr>
-              <a:t>SaaS Integration Governance · Date Code: 2026-07-14 10:17 ET</a:t>
+              <a:t>SaaS Integration Governance · Date Code: 2026-07-14 11:56 ET</a:t>
             </a:r>
           </a:p>
         </p:txBody>
@@ -19856,7 +19856,7 @@
                 </a:solidFill>
                 <a:latin typeface="Arial"/>
               </a:rPr>
-              <a:t>SaaS Integration Governance · Date Code: 2026-07-14 10:17 ET</a:t>
+              <a:t>SaaS Integration Governance · Date Code: 2026-07-14 11:56 ET</a:t>
             </a:r>
           </a:p>
         </p:txBody>

--- a/inbox/Application Aware Networking/Vol_VII_Book_06_FedAAN_SaaS_Integration_Governance.pptx
+++ b/inbox/Application Aware Networking/Vol_VII_Book_06_FedAAN_SaaS_Integration_Governance.pptx
@@ -890,7 +890,7 @@
           <a:lstStyle/>
           <a:p>
             <a:r>
-              <a:t>The necessity anchor, and the argument an assessor will actually test — so present the alternative as the steel-man it is rather than a straw man. The SCuBA consent policies are genuinely good controls and we do endorse them; say so before dismantling them as an alternative. The distinction is clean: consent restriction is about authorization of the approver, not authorization of the service. A tenant can be one hundred percent clean on SCuBA section five and still have an administrator do everything right and consent to an unauthorized CSO. Every check passes; the boundary still leaks. Note also that the other twenty-three closures are coordination-and-evidence closures per the Vol 0 Book 02 convention — the architecture volumes own the primary closure and this lane operates it. SA-9 is the exception: no other book in the series carries it.</a:t>
+              <a:t>The necessity anchor, and the argument an assessor will actually test — so present the alternative as the steel-man it is rather than a straw man. The SCuBA consent policies are genuinely good controls and we do endorse them; say so before dismantling them as an alternative. The distinction is clean: consent restriction is about authorization of the approver, not authorization of the service. A tenant can be one hundred percent clean on SCuBA section five and still have an administrator do everything right and consent to an unauthorized CSO. Every check passes; the boundary still leaks. Note also that the other twenty-three closures are coordination-and-evidence closures per the Vol 0 Book 02 convention — the architecture volumes own the primary closure and this lane operates it. SA-9 is the exception: no other book in the series carries the SA-9 closure — the Vol I books treat SA-9 as SSP coverage, not as a closure claim.</a:t>
             </a:r>
           </a:p>
           <a:p/>
@@ -12127,7 +12127,7 @@
                 </a:solidFill>
                 <a:latin typeface="Arial"/>
               </a:rPr>
-              <a:t>The instinct is to read this as one missing gate — SA-9. That reading is too small. The provisioning moment touches a fifth of the identity baseline.</a:t>
+              <a:t>The instinct is to read this as one missing gate — SA-9. That reading is too small. The provisioning moment touches two dozen controls spread across the baseline.</a:t>
             </a:r>
           </a:p>
         </p:txBody>
